--- a/images/Front-design.pptx
+++ b/images/Front-design.pptx
@@ -244,7 +244,7 @@
           <a:p>
             <a:fld id="{35A37826-251B-4A88-B5F1-14358E59E079}" type="datetimeFigureOut">
               <a:rPr lang="zh-CN" altLang="en-US" smtClean="0"/>
-              <a:t>2026/3/24</a:t>
+              <a:t>2026/3/25</a:t>
             </a:fld>
             <a:endParaRPr lang="zh-CN" altLang="en-US"/>
           </a:p>
@@ -414,7 +414,7 @@
           <a:p>
             <a:fld id="{35A37826-251B-4A88-B5F1-14358E59E079}" type="datetimeFigureOut">
               <a:rPr lang="zh-CN" altLang="en-US" smtClean="0"/>
-              <a:t>2026/3/24</a:t>
+              <a:t>2026/3/25</a:t>
             </a:fld>
             <a:endParaRPr lang="zh-CN" altLang="en-US"/>
           </a:p>
@@ -594,7 +594,7 @@
           <a:p>
             <a:fld id="{35A37826-251B-4A88-B5F1-14358E59E079}" type="datetimeFigureOut">
               <a:rPr lang="zh-CN" altLang="en-US" smtClean="0"/>
-              <a:t>2026/3/24</a:t>
+              <a:t>2026/3/25</a:t>
             </a:fld>
             <a:endParaRPr lang="zh-CN" altLang="en-US"/>
           </a:p>
@@ -764,7 +764,7 @@
           <a:p>
             <a:fld id="{35A37826-251B-4A88-B5F1-14358E59E079}" type="datetimeFigureOut">
               <a:rPr lang="zh-CN" altLang="en-US" smtClean="0"/>
-              <a:t>2026/3/24</a:t>
+              <a:t>2026/3/25</a:t>
             </a:fld>
             <a:endParaRPr lang="zh-CN" altLang="en-US"/>
           </a:p>
@@ -1010,7 +1010,7 @@
           <a:p>
             <a:fld id="{35A37826-251B-4A88-B5F1-14358E59E079}" type="datetimeFigureOut">
               <a:rPr lang="zh-CN" altLang="en-US" smtClean="0"/>
-              <a:t>2026/3/24</a:t>
+              <a:t>2026/3/25</a:t>
             </a:fld>
             <a:endParaRPr lang="zh-CN" altLang="en-US"/>
           </a:p>
@@ -1242,7 +1242,7 @@
           <a:p>
             <a:fld id="{35A37826-251B-4A88-B5F1-14358E59E079}" type="datetimeFigureOut">
               <a:rPr lang="zh-CN" altLang="en-US" smtClean="0"/>
-              <a:t>2026/3/24</a:t>
+              <a:t>2026/3/25</a:t>
             </a:fld>
             <a:endParaRPr lang="zh-CN" altLang="en-US"/>
           </a:p>
@@ -1609,7 +1609,7 @@
           <a:p>
             <a:fld id="{35A37826-251B-4A88-B5F1-14358E59E079}" type="datetimeFigureOut">
               <a:rPr lang="zh-CN" altLang="en-US" smtClean="0"/>
-              <a:t>2026/3/24</a:t>
+              <a:t>2026/3/25</a:t>
             </a:fld>
             <a:endParaRPr lang="zh-CN" altLang="en-US"/>
           </a:p>
@@ -1727,7 +1727,7 @@
           <a:p>
             <a:fld id="{35A37826-251B-4A88-B5F1-14358E59E079}" type="datetimeFigureOut">
               <a:rPr lang="zh-CN" altLang="en-US" smtClean="0"/>
-              <a:t>2026/3/24</a:t>
+              <a:t>2026/3/25</a:t>
             </a:fld>
             <a:endParaRPr lang="zh-CN" altLang="en-US"/>
           </a:p>
@@ -1822,7 +1822,7 @@
           <a:p>
             <a:fld id="{35A37826-251B-4A88-B5F1-14358E59E079}" type="datetimeFigureOut">
               <a:rPr lang="zh-CN" altLang="en-US" smtClean="0"/>
-              <a:t>2026/3/24</a:t>
+              <a:t>2026/3/25</a:t>
             </a:fld>
             <a:endParaRPr lang="zh-CN" altLang="en-US"/>
           </a:p>
@@ -2099,7 +2099,7 @@
           <a:p>
             <a:fld id="{35A37826-251B-4A88-B5F1-14358E59E079}" type="datetimeFigureOut">
               <a:rPr lang="zh-CN" altLang="en-US" smtClean="0"/>
-              <a:t>2026/3/24</a:t>
+              <a:t>2026/3/25</a:t>
             </a:fld>
             <a:endParaRPr lang="zh-CN" altLang="en-US"/>
           </a:p>
@@ -2352,7 +2352,7 @@
           <a:p>
             <a:fld id="{35A37826-251B-4A88-B5F1-14358E59E079}" type="datetimeFigureOut">
               <a:rPr lang="zh-CN" altLang="en-US" smtClean="0"/>
-              <a:t>2026/3/24</a:t>
+              <a:t>2026/3/25</a:t>
             </a:fld>
             <a:endParaRPr lang="zh-CN" altLang="en-US"/>
           </a:p>
@@ -2565,7 +2565,7 @@
           <a:p>
             <a:fld id="{35A37826-251B-4A88-B5F1-14358E59E079}" type="datetimeFigureOut">
               <a:rPr lang="zh-CN" altLang="en-US" smtClean="0"/>
-              <a:t>2026/3/24</a:t>
+              <a:t>2026/3/25</a:t>
             </a:fld>
             <a:endParaRPr lang="zh-CN" altLang="en-US"/>
           </a:p>
@@ -3117,15 +3117,6 @@
               </a:rPr>
               <a:t>)</a:t>
             </a:r>
-            <a:endParaRPr lang="en-US" altLang="zh-CN" sz="1400" kern="0" spc="300" dirty="0" smtClean="0">
-              <a:solidFill>
-                <a:schemeClr val="accent1">
-                  <a:lumMod val="50000"/>
-                </a:schemeClr>
-              </a:solidFill>
-              <a:latin typeface="微软雅黑" panose="020B0503020204020204" pitchFamily="34" charset="-122"/>
-              <a:ea typeface="微软雅黑" panose="020B0503020204020204" pitchFamily="34" charset="-122"/>
-            </a:endParaRPr>
           </a:p>
         </p:txBody>
       </p:sp>
@@ -3457,16 +3448,14 @@
         </p:nvSpPr>
         <p:spPr>
           <a:xfrm>
-            <a:off x="1104900" y="1726296"/>
+            <a:off x="1104900" y="1848015"/>
             <a:ext cx="1080000" cy="1080000"/>
           </a:xfrm>
           <a:prstGeom prst="rect">
             <a:avLst/>
           </a:prstGeom>
           <a:solidFill>
-            <a:schemeClr val="accent5">
-              <a:lumMod val="50000"/>
-            </a:schemeClr>
+            <a:srgbClr val="7030A0"/>
           </a:solidFill>
           <a:ln>
             <a:noFill/>
@@ -3493,16 +3482,6 @@
           <a:lstStyle/>
           <a:p>
             <a:pPr algn="ctr"/>
-            <a:r>
-              <a:rPr lang="en-US" altLang="zh-CN" sz="8000" b="1" dirty="0" smtClean="0">
-                <a:solidFill>
-                  <a:srgbClr val="FFFF00"/>
-                </a:solidFill>
-                <a:latin typeface="叶根友蚕燕隶书(3500)" panose="02010601030101010101" pitchFamily="2" charset="-122"/>
-                <a:ea typeface="叶根友蚕燕隶书(3500)" panose="02010601030101010101" pitchFamily="2" charset="-122"/>
-              </a:rPr>
-              <a:t>D</a:t>
-            </a:r>
             <a:endParaRPr lang="en-US" altLang="zh-CN" sz="8000" b="1" dirty="0" smtClean="0">
               <a:solidFill>
                 <a:srgbClr val="FFFF00"/>
@@ -3531,6 +3510,72 @@
           <a:xfrm>
             <a:off x="5138845" y="2359059"/>
             <a:ext cx="1914310" cy="2139881"/>
+          </a:xfrm>
+          <a:prstGeom prst="rect">
+            <a:avLst/>
+          </a:prstGeom>
+        </p:spPr>
+      </p:pic>
+      <p:sp>
+        <p:nvSpPr>
+          <p:cNvPr id="7" name="矩形 6"/>
+          <p:cNvSpPr/>
+          <p:nvPr/>
+        </p:nvSpPr>
+        <p:spPr>
+          <a:xfrm>
+            <a:off x="1177871" y="1659621"/>
+            <a:ext cx="730358" cy="1446550"/>
+          </a:xfrm>
+          <a:prstGeom prst="rect">
+            <a:avLst/>
+          </a:prstGeom>
+        </p:spPr>
+        <p:txBody>
+          <a:bodyPr wrap="square">
+            <a:spAutoFit/>
+          </a:bodyPr>
+          <a:lstStyle/>
+          <a:p>
+            <a:pPr algn="ctr"/>
+            <a:r>
+              <a:rPr lang="en-US" altLang="zh-CN" sz="8800" b="1" i="1" dirty="0" smtClean="0">
+                <a:solidFill>
+                  <a:srgbClr val="FFFF00"/>
+                </a:solidFill>
+                <a:latin typeface="Algerian" panose="04020705040A02060702" pitchFamily="82" charset="0"/>
+                <a:ea typeface="叶根友蚕燕隶书(3500)" panose="02010601030101010101" pitchFamily="2" charset="-122"/>
+              </a:rPr>
+              <a:t>D</a:t>
+            </a:r>
+            <a:endParaRPr lang="en-US" altLang="zh-CN" sz="8800" b="1" i="1" dirty="0">
+              <a:solidFill>
+                <a:srgbClr val="FFFF00"/>
+              </a:solidFill>
+              <a:latin typeface="Algerian" panose="04020705040A02060702" pitchFamily="82" charset="0"/>
+              <a:ea typeface="叶根友蚕燕隶书(3500)" panose="02010601030101010101" pitchFamily="2" charset="-122"/>
+            </a:endParaRPr>
+          </a:p>
+        </p:txBody>
+      </p:sp>
+      <p:pic>
+        <p:nvPicPr>
+          <p:cNvPr id="6" name="图片 5"/>
+          <p:cNvPicPr>
+            <a:picLocks noChangeAspect="1"/>
+          </p:cNvPicPr>
+          <p:nvPr/>
+        </p:nvPicPr>
+        <p:blipFill>
+          <a:blip r:embed="rId3"/>
+          <a:stretch>
+            <a:fillRect/>
+          </a:stretch>
+        </p:blipFill>
+        <p:spPr>
+          <a:xfrm>
+            <a:off x="7976197" y="3251797"/>
+            <a:ext cx="868755" cy="868755"/>
           </a:xfrm>
           <a:prstGeom prst="rect">
             <a:avLst/>
